--- a/Rapport de PROJET/Diapo-Oral.pptx
+++ b/Rapport de PROJET/Diapo-Oral.pptx
@@ -247,7 +247,7 @@
             <a:pPr rtl="0"/>
             <a:fld id="{1CD784F2-097A-4060-8FF3-6FB91EC3D7DB}" type="datetime1">
               <a:rPr lang="fr-FR" smtClean="0"/>
-              <a:t>11/06/2026</a:t>
+              <a:t>12/06/2026</a:t>
             </a:fld>
             <a:endParaRPr lang="fr-FR"/>
           </a:p>
@@ -429,7 +429,7 @@
             <a:pPr rtl="0"/>
             <a:fld id="{6BF86344-02EE-4788-B238-DABD819F9A49}" type="datetime1">
               <a:rPr lang="fr-FR" noProof="0" smtClean="0"/>
-              <a:t>11/06/2026</a:t>
+              <a:t>12/06/2026</a:t>
             </a:fld>
             <a:endParaRPr lang="fr-FR" noProof="0"/>
           </a:p>
@@ -26732,7 +26732,7 @@
             </a:pPr>
             <a:r>
               <a:rPr lang="fr-FR" dirty="0"/>
-              <a:t>Refusion au four avec un profil thermique une montée progressive, pic ~250°C puis refroidissement dégressif </a:t>
+              <a:t>Refusion au four avec un profil thermique une montée progressive(choc thermique), pic ~250°C puis refroidissement dégressif </a:t>
             </a:r>
           </a:p>
           <a:p>
@@ -26790,7 +26790,7 @@
         </p:blipFill>
         <p:spPr>
           <a:xfrm>
-            <a:off x="2939837" y="3429000"/>
+            <a:off x="1116164" y="3351529"/>
             <a:ext cx="2287905" cy="3045460"/>
           </a:xfrm>
           <a:prstGeom prst="rect">
@@ -26827,7 +26827,7 @@
         </p:blipFill>
         <p:spPr>
           <a:xfrm flipH="1">
-            <a:off x="6505784" y="3250882"/>
+            <a:off x="8177948" y="3150234"/>
             <a:ext cx="2434590" cy="3246755"/>
           </a:xfrm>
           <a:prstGeom prst="rect">
@@ -26838,6 +26838,53 @@
             <a:noFill/>
             <a:prstDash/>
           </a:ln>
+        </p:spPr>
+      </p:pic>
+      <p:pic>
+        <p:nvPicPr>
+          <p:cNvPr id="1026" name="Picture 2" descr="Type7 High Ag No Clean Solder Paste SAC305 Manufacturers and Suppliers  China - Pricelist - BBIEN Technology">
+            <a:extLst>
+              <a:ext uri="{FF2B5EF4-FFF2-40B4-BE49-F238E27FC236}">
+                <a16:creationId xmlns:a16="http://schemas.microsoft.com/office/drawing/2014/main" id="{F67039D4-A1BE-DB24-E2F2-171E4C315628}"/>
+              </a:ext>
+            </a:extLst>
+          </p:cNvPr>
+          <p:cNvPicPr>
+            <a:picLocks noChangeAspect="1" noChangeArrowheads="1"/>
+          </p:cNvPicPr>
+          <p:nvPr/>
+        </p:nvPicPr>
+        <p:blipFill>
+          <a:blip r:embed="rId4">
+            <a:extLst>
+              <a:ext uri="{28A0092B-C50C-407E-A947-70E740481C1C}">
+                <a14:useLocalDpi xmlns:a14="http://schemas.microsoft.com/office/drawing/2010/main" val="0"/>
+              </a:ext>
+            </a:extLst>
+          </a:blip>
+          <a:srcRect/>
+          <a:stretch>
+            <a:fillRect/>
+          </a:stretch>
+        </p:blipFill>
+        <p:spPr bwMode="auto">
+          <a:xfrm>
+            <a:off x="3896266" y="3505850"/>
+            <a:ext cx="3859940" cy="2680195"/>
+          </a:xfrm>
+          <a:prstGeom prst="rect">
+            <a:avLst/>
+          </a:prstGeom>
+          <a:noFill/>
+          <a:extLst>
+            <a:ext uri="{909E8E84-426E-40DD-AFC4-6F175D3DCCD1}">
+              <a14:hiddenFill xmlns:a14="http://schemas.microsoft.com/office/drawing/2010/main">
+                <a:solidFill>
+                  <a:srgbClr val="FFFFFF"/>
+                </a:solidFill>
+              </a14:hiddenFill>
+            </a:ext>
+          </a:extLst>
         </p:spPr>
       </p:pic>
     </p:spTree>
@@ -27200,7 +27247,7 @@
             <a:pPr rtl="0"/>
             <a:r>
               <a:rPr lang="fr-FR" dirty="0"/>
-              <a:t>8) Conclusion</a:t>
+              <a:t>8) Conclusions</a:t>
             </a:r>
           </a:p>
         </p:txBody>
@@ -27309,7 +27356,7 @@
                   <a:schemeClr val="bg1"/>
                 </a:solidFill>
               </a:rPr>
-              <a:t>Développement MicroPython et interface web embarqués sur ESP32</a:t>
+              <a:t>Développement Micro-Python et une interface web embarquées sur ESP32</a:t>
             </a:r>
           </a:p>
           <a:p>
@@ -27330,7 +27377,7 @@
                   <a:schemeClr val="bg1"/>
                 </a:solidFill>
               </a:rPr>
-              <a:t>Résultat concret</a:t>
+              <a:t>Résultats concrets</a:t>
             </a:r>
           </a:p>
           <a:p>
@@ -27588,7 +27635,7 @@
             </a:pPr>
             <a:r>
               <a:rPr lang="fr-FR" sz="2000" dirty="0"/>
-              <a:t>Conclusion</a:t>
+              <a:t>Conclusions</a:t>
             </a:r>
           </a:p>
         </p:txBody>
@@ -28242,7 +28289,7 @@
         </p:spPr>
         <p:txBody>
           <a:bodyPr rtlCol="0">
-            <a:normAutofit fontScale="62500" lnSpcReduction="20000"/>
+            <a:normAutofit fontScale="85000" lnSpcReduction="20000"/>
           </a:bodyPr>
           <a:lstStyle/>
           <a:p>
@@ -28255,7 +28302,7 @@
                   <a:schemeClr val="bg1"/>
                 </a:solidFill>
               </a:rPr>
-              <a:t>Diagramme des cas d’utilisation et diagramme des exigences</a:t>
+              <a:t>Diagramme des cas d’utilisations</a:t>
             </a:r>
           </a:p>
         </p:txBody>
@@ -28282,8 +28329,8 @@
         </p:blipFill>
         <p:spPr>
           <a:xfrm>
-            <a:off x="2691570" y="2034307"/>
-            <a:ext cx="5763582" cy="3563412"/>
+            <a:off x="2695493" y="2002501"/>
+            <a:ext cx="6109517" cy="3777291"/>
           </a:xfrm>
           <a:prstGeom prst="rect">
             <a:avLst/>
@@ -28450,7 +28497,7 @@
         </p:blipFill>
         <p:spPr>
           <a:xfrm>
-            <a:off x="1869565" y="1381282"/>
+            <a:off x="1909321" y="1381282"/>
             <a:ext cx="8568204" cy="5298918"/>
           </a:xfrm>
           <a:prstGeom prst="rect">
@@ -28458,6 +28505,46 @@
           </a:prstGeom>
         </p:spPr>
       </p:pic>
+      <p:sp>
+        <p:nvSpPr>
+          <p:cNvPr id="4" name="ZoneTexte 3">
+            <a:extLst>
+              <a:ext uri="{FF2B5EF4-FFF2-40B4-BE49-F238E27FC236}">
+                <a16:creationId xmlns:a16="http://schemas.microsoft.com/office/drawing/2014/main" id="{D4B6545D-DE13-F12A-D002-B7C13A0C9AAB}"/>
+              </a:ext>
+            </a:extLst>
+          </p:cNvPr>
+          <p:cNvSpPr txBox="1"/>
+          <p:nvPr/>
+        </p:nvSpPr>
+        <p:spPr>
+          <a:xfrm>
+            <a:off x="111318" y="1494845"/>
+            <a:ext cx="1900362" cy="646331"/>
+          </a:xfrm>
+          <a:prstGeom prst="rect">
+            <a:avLst/>
+          </a:prstGeom>
+          <a:noFill/>
+        </p:spPr>
+        <p:txBody>
+          <a:bodyPr wrap="square" rtlCol="0">
+            <a:spAutoFit/>
+          </a:bodyPr>
+          <a:lstStyle/>
+          <a:p>
+            <a:r>
+              <a:rPr lang="fr-FR" dirty="0">
+                <a:solidFill>
+                  <a:schemeClr val="bg1"/>
+                </a:solidFill>
+              </a:rPr>
+              <a:t>diagramme des exigences</a:t>
+            </a:r>
+            <a:endParaRPr lang="fr-FR" dirty="0"/>
+          </a:p>
+        </p:txBody>
+      </p:sp>
     </p:spTree>
     <p:extLst>
       <p:ext uri="{BB962C8B-B14F-4D97-AF65-F5344CB8AC3E}">
@@ -29984,21 +30071,21 @@
 </file>
 
 <file path=customXml/item1.xml><?xml version="1.0" encoding="utf-8"?>
+<p:properties xmlns:p="http://schemas.microsoft.com/office/2006/metadata/properties" xmlns:xsi="http://www.w3.org/2001/XMLSchema-instance" xmlns:pc="http://schemas.microsoft.com/office/infopath/2007/PartnerControls">
+  <documentManagement>
+    <_ip_UnifiedCompliancePolicyUIAction xmlns="http://schemas.microsoft.com/sharepoint/v3" xsi:nil="true"/>
+    <_ip_UnifiedCompliancePolicyProperties xmlns="http://schemas.microsoft.com/sharepoint/v3" xsi:nil="true"/>
+  </documentManagement>
+</p:properties>
+</file>
+
+<file path=customXml/item2.xml><?xml version="1.0" encoding="utf-8"?>
 <?mso-contentType ?>
 <FormTemplates xmlns="http://schemas.microsoft.com/sharepoint/v3/contenttype/forms">
   <Display>DocumentLibraryForm</Display>
   <Edit>DocumentLibraryForm</Edit>
   <New>DocumentLibraryForm</New>
 </FormTemplates>
-</file>
-
-<file path=customXml/item2.xml><?xml version="1.0" encoding="utf-8"?>
-<p:properties xmlns:p="http://schemas.microsoft.com/office/2006/metadata/properties" xmlns:xsi="http://www.w3.org/2001/XMLSchema-instance" xmlns:pc="http://schemas.microsoft.com/office/infopath/2007/PartnerControls">
-  <documentManagement>
-    <_ip_UnifiedCompliancePolicyUIAction xmlns="http://schemas.microsoft.com/sharepoint/v3" xsi:nil="true"/>
-    <_ip_UnifiedCompliancePolicyProperties xmlns="http://schemas.microsoft.com/sharepoint/v3" xsi:nil="true"/>
-  </documentManagement>
-</p:properties>
 </file>
 
 <file path=customXml/item3.xml><?xml version="1.0" encoding="utf-8"?>
@@ -30210,14 +30297,6 @@
 </file>
 
 <file path=customXml/itemProps1.xml><?xml version="1.0" encoding="utf-8"?>
-<ds:datastoreItem xmlns:ds="http://schemas.openxmlformats.org/officeDocument/2006/customXml" ds:itemID="{8A95DE24-D6C3-4A00-9085-D9594C193AE1}">
-  <ds:schemaRefs>
-    <ds:schemaRef ds:uri="http://schemas.microsoft.com/sharepoint/v3/contenttype/forms"/>
-  </ds:schemaRefs>
-</ds:datastoreItem>
-</file>
-
-<file path=customXml/itemProps2.xml><?xml version="1.0" encoding="utf-8"?>
 <ds:datastoreItem xmlns:ds="http://schemas.openxmlformats.org/officeDocument/2006/customXml" ds:itemID="{F8992231-163D-4428-A2B8-DA1FE0274129}">
   <ds:schemaRefs>
     <ds:schemaRef ds:uri="http://purl.org/dc/dcmitype/"/>
@@ -30231,6 +30310,14 @@
     <ds:schemaRef ds:uri="http://purl.org/dc/terms/"/>
     <ds:schemaRef ds:uri="http://schemas.microsoft.com/office/infopath/2007/PartnerControls"/>
     <ds:schemaRef ds:uri="http://www.w3.org/XML/1998/namespace"/>
+  </ds:schemaRefs>
+</ds:datastoreItem>
+</file>
+
+<file path=customXml/itemProps2.xml><?xml version="1.0" encoding="utf-8"?>
+<ds:datastoreItem xmlns:ds="http://schemas.openxmlformats.org/officeDocument/2006/customXml" ds:itemID="{8A95DE24-D6C3-4A00-9085-D9594C193AE1}">
+  <ds:schemaRefs>
+    <ds:schemaRef ds:uri="http://schemas.microsoft.com/sharepoint/v3/contenttype/forms"/>
   </ds:schemaRefs>
 </ds:datastoreItem>
 </file>

--- a/Rapport de PROJET/Diapo-Oral.pptx
+++ b/Rapport de PROJET/Diapo-Oral.pptx
@@ -5,10 +5,10 @@
     <p:sldMasterId id="2147483648" r:id="rId4"/>
   </p:sldMasterIdLst>
   <p:notesMasterIdLst>
-    <p:notesMasterId r:id="rId25"/>
+    <p:notesMasterId r:id="rId23"/>
   </p:notesMasterIdLst>
   <p:handoutMasterIdLst>
-    <p:handoutMasterId r:id="rId26"/>
+    <p:handoutMasterId r:id="rId24"/>
   </p:handoutMasterIdLst>
   <p:sldIdLst>
     <p:sldId id="256" r:id="rId5"/>
@@ -18,19 +18,17 @@
     <p:sldId id="260" r:id="rId9"/>
     <p:sldId id="287" r:id="rId10"/>
     <p:sldId id="270" r:id="rId11"/>
-    <p:sldId id="286" r:id="rId12"/>
-    <p:sldId id="271" r:id="rId13"/>
-    <p:sldId id="277" r:id="rId14"/>
-    <p:sldId id="273" r:id="rId15"/>
-    <p:sldId id="278" r:id="rId16"/>
-    <p:sldId id="279" r:id="rId17"/>
-    <p:sldId id="282" r:id="rId18"/>
-    <p:sldId id="274" r:id="rId19"/>
-    <p:sldId id="283" r:id="rId20"/>
-    <p:sldId id="284" r:id="rId21"/>
-    <p:sldId id="275" r:id="rId22"/>
-    <p:sldId id="276" r:id="rId23"/>
-    <p:sldId id="269" r:id="rId24"/>
+    <p:sldId id="271" r:id="rId12"/>
+    <p:sldId id="277" r:id="rId13"/>
+    <p:sldId id="273" r:id="rId14"/>
+    <p:sldId id="279" r:id="rId15"/>
+    <p:sldId id="282" r:id="rId16"/>
+    <p:sldId id="274" r:id="rId17"/>
+    <p:sldId id="283" r:id="rId18"/>
+    <p:sldId id="284" r:id="rId19"/>
+    <p:sldId id="275" r:id="rId20"/>
+    <p:sldId id="276" r:id="rId21"/>
+    <p:sldId id="269" r:id="rId22"/>
   </p:sldIdLst>
   <p:sldSz cx="12192000" cy="6858000"/>
   <p:notesSz cx="6858000" cy="9144000"/>
@@ -247,7 +245,7 @@
             <a:pPr rtl="0"/>
             <a:fld id="{1CD784F2-097A-4060-8FF3-6FB91EC3D7DB}" type="datetime1">
               <a:rPr lang="fr-FR" smtClean="0"/>
-              <a:t>12/06/2026</a:t>
+              <a:t>13/06/2026</a:t>
             </a:fld>
             <a:endParaRPr lang="fr-FR"/>
           </a:p>
@@ -429,7 +427,7 @@
             <a:pPr rtl="0"/>
             <a:fld id="{6BF86344-02EE-4788-B238-DABD819F9A49}" type="datetime1">
               <a:rPr lang="fr-FR" noProof="0" smtClean="0"/>
-              <a:t>12/06/2026</a:t>
+              <a:t>13/06/2026</a:t>
             </a:fld>
             <a:endParaRPr lang="fr-FR" noProof="0"/>
           </a:p>
@@ -1053,7 +1051,7 @@
             <a:pPr rtl="0"/>
             <a:fld id="{1734D747-9380-41EE-9946-EC9EC0CA5D1E}" type="slidenum">
               <a:rPr lang="fr-FR" smtClean="0"/>
-              <a:t>20</a:t>
+              <a:t>18</a:t>
             </a:fld>
             <a:endParaRPr lang="fr-FR"/>
           </a:p>
@@ -24852,240 +24850,6 @@
       </p:grpSpPr>
       <p:sp>
         <p:nvSpPr>
-          <p:cNvPr id="4" name="Titre 3">
-            <a:extLst>
-              <a:ext uri="{FF2B5EF4-FFF2-40B4-BE49-F238E27FC236}">
-                <a16:creationId xmlns:a16="http://schemas.microsoft.com/office/drawing/2014/main" id="{002B1A51-0F48-A4D8-99E7-F737CCDEF142}"/>
-              </a:ext>
-            </a:extLst>
-          </p:cNvPr>
-          <p:cNvSpPr>
-            <a:spLocks noGrp="1"/>
-          </p:cNvSpPr>
-          <p:nvPr>
-            <p:ph type="title"/>
-          </p:nvPr>
-        </p:nvSpPr>
-        <p:spPr/>
-        <p:txBody>
-          <a:bodyPr/>
-          <a:lstStyle/>
-          <a:p>
-            <a:r>
-              <a:rPr lang="fr-FR" dirty="0"/>
-              <a:t>5) Site et codes</a:t>
-            </a:r>
-          </a:p>
-        </p:txBody>
-      </p:sp>
-      <p:sp>
-        <p:nvSpPr>
-          <p:cNvPr id="3" name="Espace réservé du numéro de diapositive 2">
-            <a:extLst>
-              <a:ext uri="{FF2B5EF4-FFF2-40B4-BE49-F238E27FC236}">
-                <a16:creationId xmlns:a16="http://schemas.microsoft.com/office/drawing/2014/main" id="{B76FC3BC-F03A-C119-2E1D-533EDAF1D4CC}"/>
-              </a:ext>
-            </a:extLst>
-          </p:cNvPr>
-          <p:cNvSpPr>
-            <a:spLocks noGrp="1"/>
-          </p:cNvSpPr>
-          <p:nvPr>
-            <p:ph type="sldNum" sz="quarter" idx="12"/>
-          </p:nvPr>
-        </p:nvSpPr>
-        <p:spPr/>
-        <p:txBody>
-          <a:bodyPr/>
-          <a:lstStyle/>
-          <a:p>
-            <a:pPr rtl="0"/>
-            <a:fld id="{C263D6C4-4840-40CC-AC84-17E24B3B7BDE}" type="slidenum">
-              <a:rPr lang="fr-FR" noProof="0" smtClean="0"/>
-              <a:pPr rtl="0"/>
-              <a:t>10</a:t>
-            </a:fld>
-            <a:endParaRPr lang="fr-FR" noProof="0"/>
-          </a:p>
-        </p:txBody>
-      </p:sp>
-      <p:sp>
-        <p:nvSpPr>
-          <p:cNvPr id="5" name="Espace réservé du texte 4">
-            <a:extLst>
-              <a:ext uri="{FF2B5EF4-FFF2-40B4-BE49-F238E27FC236}">
-                <a16:creationId xmlns:a16="http://schemas.microsoft.com/office/drawing/2014/main" id="{1A4C90AA-8285-62FA-9A71-3FDFEC59724C}"/>
-              </a:ext>
-            </a:extLst>
-          </p:cNvPr>
-          <p:cNvSpPr>
-            <a:spLocks noGrp="1"/>
-          </p:cNvSpPr>
-          <p:nvPr>
-            <p:ph type="body" sz="quarter" idx="13"/>
-          </p:nvPr>
-        </p:nvSpPr>
-        <p:spPr>
-          <a:xfrm>
-            <a:off x="261620" y="1601531"/>
-            <a:ext cx="6718300" cy="4093243"/>
-          </a:xfrm>
-        </p:spPr>
-        <p:txBody>
-          <a:bodyPr/>
-          <a:lstStyle/>
-          <a:p>
-            <a:pPr marL="342900" indent="-342900"/>
-            <a:r>
-              <a:rPr lang="fr-FR" dirty="0"/>
-              <a:t>Algorigramme du site </a:t>
-            </a:r>
-          </a:p>
-        </p:txBody>
-      </p:sp>
-      <p:pic>
-        <p:nvPicPr>
-          <p:cNvPr id="6" name="Image10">
-            <a:extLst>
-              <a:ext uri="{FF2B5EF4-FFF2-40B4-BE49-F238E27FC236}">
-                <a16:creationId xmlns:a16="http://schemas.microsoft.com/office/drawing/2014/main" id="{9DFEBD3E-0D2F-3919-EC23-91AB697611F5}"/>
-              </a:ext>
-            </a:extLst>
-          </p:cNvPr>
-          <p:cNvPicPr/>
-          <p:nvPr/>
-        </p:nvPicPr>
-        <p:blipFill>
-          <a:blip r:embed="rId2">
-            <a:lum/>
-            <a:alphaModFix/>
-          </a:blip>
-          <a:srcRect/>
-          <a:stretch>
-            <a:fillRect/>
-          </a:stretch>
-        </p:blipFill>
-        <p:spPr>
-          <a:xfrm>
-            <a:off x="6051550" y="1558220"/>
-            <a:ext cx="5696710" cy="4277090"/>
-          </a:xfrm>
-          <a:prstGeom prst="rect">
-            <a:avLst/>
-          </a:prstGeom>
-          <a:noFill/>
-          <a:ln>
-            <a:noFill/>
-            <a:prstDash/>
-          </a:ln>
-        </p:spPr>
-      </p:pic>
-      <p:pic>
-        <p:nvPicPr>
-          <p:cNvPr id="7" name="Image3">
-            <a:extLst>
-              <a:ext uri="{FF2B5EF4-FFF2-40B4-BE49-F238E27FC236}">
-                <a16:creationId xmlns:a16="http://schemas.microsoft.com/office/drawing/2014/main" id="{8025A8A9-ACD7-0E78-4FF2-7826C7DE7843}"/>
-              </a:ext>
-            </a:extLst>
-          </p:cNvPr>
-          <p:cNvPicPr/>
-          <p:nvPr/>
-        </p:nvPicPr>
-        <p:blipFill>
-          <a:blip r:embed="rId3">
-            <a:lum/>
-            <a:alphaModFix/>
-          </a:blip>
-          <a:srcRect l="13596" t="25048" r="13807" b="27279"/>
-          <a:stretch>
-            <a:fillRect/>
-          </a:stretch>
-        </p:blipFill>
-        <p:spPr>
-          <a:xfrm>
-            <a:off x="10088545" y="0"/>
-            <a:ext cx="2103455" cy="783771"/>
-          </a:xfrm>
-          <a:prstGeom prst="rect">
-            <a:avLst/>
-          </a:prstGeom>
-          <a:noFill/>
-          <a:ln>
-            <a:noFill/>
-            <a:prstDash/>
-          </a:ln>
-        </p:spPr>
-      </p:pic>
-      <p:pic>
-        <p:nvPicPr>
-          <p:cNvPr id="8" name="Image9">
-            <a:extLst>
-              <a:ext uri="{FF2B5EF4-FFF2-40B4-BE49-F238E27FC236}">
-                <a16:creationId xmlns:a16="http://schemas.microsoft.com/office/drawing/2014/main" id="{3C0473FD-3FF2-1B8C-E9BA-6BF1B5D0504A}"/>
-              </a:ext>
-            </a:extLst>
-          </p:cNvPr>
-          <p:cNvPicPr/>
-          <p:nvPr/>
-        </p:nvPicPr>
-        <p:blipFill>
-          <a:blip r:embed="rId4">
-            <a:lum/>
-            <a:alphaModFix/>
-          </a:blip>
-          <a:srcRect t="4202" r="22768"/>
-          <a:stretch>
-            <a:fillRect/>
-          </a:stretch>
-        </p:blipFill>
-        <p:spPr>
-          <a:xfrm>
-            <a:off x="533400" y="2044906"/>
-            <a:ext cx="4475922" cy="4452731"/>
-          </a:xfrm>
-          <a:prstGeom prst="rect">
-            <a:avLst/>
-          </a:prstGeom>
-          <a:noFill/>
-          <a:ln>
-            <a:noFill/>
-            <a:prstDash/>
-          </a:ln>
-        </p:spPr>
-      </p:pic>
-    </p:spTree>
-    <p:extLst>
-      <p:ext uri="{BB962C8B-B14F-4D97-AF65-F5344CB8AC3E}">
-        <p14:creationId xmlns:p14="http://schemas.microsoft.com/office/powerpoint/2010/main" val="3620413839"/>
-      </p:ext>
-    </p:extLst>
-  </p:cSld>
-  <p:clrMapOvr>
-    <a:masterClrMapping/>
-  </p:clrMapOvr>
-</p:sld>
-</file>
-
-<file path=ppt/slides/slide11.xml><?xml version="1.0" encoding="utf-8"?>
-<p:sld xmlns:a="http://schemas.openxmlformats.org/drawingml/2006/main" xmlns:r="http://schemas.openxmlformats.org/officeDocument/2006/relationships" xmlns:p="http://schemas.openxmlformats.org/presentationml/2006/main">
-  <p:cSld>
-    <p:spTree>
-      <p:nvGrpSpPr>
-        <p:cNvPr id="1" name=""/>
-        <p:cNvGrpSpPr/>
-        <p:nvPr/>
-      </p:nvGrpSpPr>
-      <p:grpSpPr>
-        <a:xfrm>
-          <a:off x="0" y="0"/>
-          <a:ext cx="0" cy="0"/>
-          <a:chOff x="0" y="0"/>
-          <a:chExt cx="0" cy="0"/>
-        </a:xfrm>
-      </p:grpSpPr>
-      <p:sp>
-        <p:nvSpPr>
           <p:cNvPr id="4" name="Titre"/>
           <p:cNvSpPr>
             <a:spLocks noGrp="1"/>
@@ -25131,7 +24895,7 @@
             <a:fld id="{C263D6C4-4840-40CC-AC84-17E24B3B7BDE}" type="slidenum">
               <a:rPr lang="fr-FR" smtClean="0"/>
               <a:pPr rtl="0"/>
-              <a:t>11</a:t>
+              <a:t>10</a:t>
             </a:fld>
             <a:endParaRPr lang="fr-FR"/>
           </a:p>
@@ -25149,7 +24913,7 @@
         </p:nvSpPr>
         <p:spPr>
           <a:xfrm>
-            <a:off x="261621" y="1601531"/>
+            <a:off x="82163" y="1492246"/>
             <a:ext cx="5834379" cy="5365754"/>
           </a:xfrm>
         </p:spPr>
@@ -25187,7 +24951,7 @@
                   <a:schemeClr val="bg1"/>
                 </a:solidFill>
               </a:rPr>
-              <a:t>Protection contre l’inversion de polarité : MOSFET canal P (Q1) + R17 + référence Zener LM4040</a:t>
+              <a:t>Protection contre l’inversion de polarité : MOSFET</a:t>
             </a:r>
           </a:p>
           <a:p>
@@ -25210,7 +24974,7 @@
                   <a:schemeClr val="bg1"/>
                 </a:solidFill>
               </a:rPr>
-              <a:t>Condensateurs de filtrage C8 et C9</a:t>
+              <a:t>MCP3021 convertisseur analogique numérique </a:t>
             </a:r>
           </a:p>
           <a:p>
@@ -25235,6 +24999,30 @@
                 </a:solidFill>
               </a:rPr>
               <a:t>Régulateur de tension a découpage (U3) : pour convertir la tension 12V en 5V</a:t>
+            </a:r>
+          </a:p>
+          <a:p>
+            <a:pPr marL="342900" indent="0">
+              <a:buNone/>
+            </a:pPr>
+            <a:endParaRPr lang="fr-FR" sz="1600" dirty="0">
+              <a:solidFill>
+                <a:schemeClr val="bg1"/>
+              </a:solidFill>
+            </a:endParaRPr>
+          </a:p>
+          <a:p>
+            <a:pPr marL="685800" indent="-342900">
+              <a:buFont typeface="Arial" panose="020B0604020202020204" pitchFamily="34" charset="0"/>
+              <a:buChar char="-"/>
+            </a:pPr>
+            <a:r>
+              <a:rPr lang="fr-FR" sz="1600" dirty="0">
+                <a:solidFill>
+                  <a:schemeClr val="bg1"/>
+                </a:solidFill>
+              </a:rPr>
+              <a:t>AZ1117 convertir la tension de 5V à 3V3</a:t>
             </a:r>
           </a:p>
           <a:p>
@@ -25288,76 +25076,49 @@
       </p:pic>
       <p:pic>
         <p:nvPicPr>
-          <p:cNvPr id="7" name="Image 6">
+          <p:cNvPr id="1026" name="Picture 2">
             <a:extLst>
               <a:ext uri="{FF2B5EF4-FFF2-40B4-BE49-F238E27FC236}">
-                <a16:creationId xmlns:a16="http://schemas.microsoft.com/office/drawing/2014/main" id="{E4845AAD-C427-F923-BAF5-7EB8AEA9FD7C}"/>
+                <a16:creationId xmlns:a16="http://schemas.microsoft.com/office/drawing/2014/main" id="{0AC3D760-46D6-B584-3ECA-AE5890646E74}"/>
               </a:ext>
             </a:extLst>
           </p:cNvPr>
-          <p:cNvPicPr/>
+          <p:cNvPicPr>
+            <a:picLocks noChangeAspect="1" noChangeArrowheads="1"/>
+          </p:cNvPicPr>
           <p:nvPr/>
         </p:nvPicPr>
         <p:blipFill>
           <a:blip r:embed="rId3">
-            <a:lum/>
-            <a:alphaModFix/>
+            <a:extLst>
+              <a:ext uri="{28A0092B-C50C-407E-A947-70E740481C1C}">
+                <a14:useLocalDpi xmlns:a14="http://schemas.microsoft.com/office/drawing/2010/main" val="0"/>
+              </a:ext>
+            </a:extLst>
           </a:blip>
           <a:srcRect/>
           <a:stretch>
             <a:fillRect/>
           </a:stretch>
         </p:blipFill>
-        <p:spPr>
-          <a:xfrm rot="5400013">
-            <a:off x="7408768" y="838877"/>
-            <a:ext cx="2739867" cy="3745252"/>
+        <p:spPr bwMode="auto">
+          <a:xfrm>
+            <a:off x="5604165" y="1601531"/>
+            <a:ext cx="6505672" cy="4553970"/>
           </a:xfrm>
           <a:prstGeom prst="rect">
             <a:avLst/>
           </a:prstGeom>
           <a:noFill/>
-          <a:ln>
-            <a:noFill/>
-            <a:prstDash/>
-          </a:ln>
-        </p:spPr>
-      </p:pic>
-      <p:pic>
-        <p:nvPicPr>
-          <p:cNvPr id="8" name="Image 7">
-            <a:extLst>
-              <a:ext uri="{FF2B5EF4-FFF2-40B4-BE49-F238E27FC236}">
-                <a16:creationId xmlns:a16="http://schemas.microsoft.com/office/drawing/2014/main" id="{A6BB7F24-E6CF-5AC3-17FA-E32C3AF2989C}"/>
-              </a:ext>
-            </a:extLst>
-          </p:cNvPr>
-          <p:cNvPicPr/>
-          <p:nvPr/>
-        </p:nvPicPr>
-        <p:blipFill>
-          <a:blip r:embed="rId4">
-            <a:lum/>
-            <a:alphaModFix/>
-          </a:blip>
-          <a:srcRect/>
-          <a:stretch>
-            <a:fillRect/>
-          </a:stretch>
-        </p:blipFill>
-        <p:spPr>
-          <a:xfrm rot="5400013">
-            <a:off x="7570615" y="2927976"/>
-            <a:ext cx="2416175" cy="4723130"/>
-          </a:xfrm>
-          <a:prstGeom prst="rect">
-            <a:avLst/>
-          </a:prstGeom>
-          <a:noFill/>
-          <a:ln>
-            <a:noFill/>
-            <a:prstDash/>
-          </a:ln>
+          <a:extLst>
+            <a:ext uri="{909E8E84-426E-40DD-AFC4-6F175D3DCCD1}">
+              <a14:hiddenFill xmlns:a14="http://schemas.microsoft.com/office/drawing/2010/main">
+                <a:solidFill>
+                  <a:srgbClr val="FFFFFF"/>
+                </a:solidFill>
+              </a14:hiddenFill>
+            </a:ext>
+          </a:extLst>
         </p:spPr>
       </p:pic>
     </p:spTree>
@@ -25368,224 +25129,7 @@
 </p:sld>
 </file>
 
-<file path=ppt/slides/slide12.xml><?xml version="1.0" encoding="utf-8"?>
-<p:sld xmlns:a="http://schemas.openxmlformats.org/drawingml/2006/main" xmlns:r="http://schemas.openxmlformats.org/officeDocument/2006/relationships" xmlns:p="http://schemas.openxmlformats.org/presentationml/2006/main">
-  <p:cSld>
-    <p:spTree>
-      <p:nvGrpSpPr>
-        <p:cNvPr id="1" name=""/>
-        <p:cNvGrpSpPr/>
-        <p:nvPr/>
-      </p:nvGrpSpPr>
-      <p:grpSpPr>
-        <a:xfrm>
-          <a:off x="0" y="0"/>
-          <a:ext cx="0" cy="0"/>
-          <a:chOff x="0" y="0"/>
-          <a:chExt cx="0" cy="0"/>
-        </a:xfrm>
-      </p:grpSpPr>
-      <p:sp>
-        <p:nvSpPr>
-          <p:cNvPr id="4" name="Titre 3">
-            <a:extLst>
-              <a:ext uri="{FF2B5EF4-FFF2-40B4-BE49-F238E27FC236}">
-                <a16:creationId xmlns:a16="http://schemas.microsoft.com/office/drawing/2014/main" id="{D2CA9C16-F0AC-E185-42C3-B5F3419B9BD2}"/>
-              </a:ext>
-            </a:extLst>
-          </p:cNvPr>
-          <p:cNvSpPr>
-            <a:spLocks noGrp="1"/>
-          </p:cNvSpPr>
-          <p:nvPr>
-            <p:ph type="title"/>
-          </p:nvPr>
-        </p:nvSpPr>
-        <p:spPr/>
-        <p:txBody>
-          <a:bodyPr/>
-          <a:lstStyle/>
-          <a:p>
-            <a:r>
-              <a:rPr lang="fr-FR" dirty="0"/>
-              <a:t>6) Schéma et routage</a:t>
-            </a:r>
-          </a:p>
-        </p:txBody>
-      </p:sp>
-      <p:sp>
-        <p:nvSpPr>
-          <p:cNvPr id="3" name="Espace réservé du numéro de diapositive 2">
-            <a:extLst>
-              <a:ext uri="{FF2B5EF4-FFF2-40B4-BE49-F238E27FC236}">
-                <a16:creationId xmlns:a16="http://schemas.microsoft.com/office/drawing/2014/main" id="{2FE459F9-2567-7DE4-A2A3-A4383C14DBEB}"/>
-              </a:ext>
-            </a:extLst>
-          </p:cNvPr>
-          <p:cNvSpPr>
-            <a:spLocks noGrp="1"/>
-          </p:cNvSpPr>
-          <p:nvPr>
-            <p:ph type="sldNum" sz="quarter" idx="12"/>
-          </p:nvPr>
-        </p:nvSpPr>
-        <p:spPr/>
-        <p:txBody>
-          <a:bodyPr/>
-          <a:lstStyle/>
-          <a:p>
-            <a:pPr rtl="0"/>
-            <a:fld id="{C263D6C4-4840-40CC-AC84-17E24B3B7BDE}" type="slidenum">
-              <a:rPr lang="fr-FR" noProof="0" smtClean="0"/>
-              <a:pPr rtl="0"/>
-              <a:t>12</a:t>
-            </a:fld>
-            <a:endParaRPr lang="fr-FR" noProof="0"/>
-          </a:p>
-        </p:txBody>
-      </p:sp>
-      <p:sp>
-        <p:nvSpPr>
-          <p:cNvPr id="6" name="Espace réservé du texte 5">
-            <a:extLst>
-              <a:ext uri="{FF2B5EF4-FFF2-40B4-BE49-F238E27FC236}">
-                <a16:creationId xmlns:a16="http://schemas.microsoft.com/office/drawing/2014/main" id="{60962B86-38E0-ECD0-2D8C-C804085C70A0}"/>
-              </a:ext>
-            </a:extLst>
-          </p:cNvPr>
-          <p:cNvSpPr>
-            <a:spLocks noGrp="1"/>
-          </p:cNvSpPr>
-          <p:nvPr>
-            <p:ph type="body" sz="half" idx="2"/>
-          </p:nvPr>
-        </p:nvSpPr>
-        <p:spPr>
-          <a:xfrm>
-            <a:off x="-190831" y="1985338"/>
-            <a:ext cx="4675367" cy="4579079"/>
-          </a:xfrm>
-        </p:spPr>
-        <p:txBody>
-          <a:bodyPr/>
-          <a:lstStyle/>
-          <a:p>
-            <a:pPr marL="685800" indent="-342900">
-              <a:buChar char="-"/>
-            </a:pPr>
-            <a:r>
-              <a:rPr lang="fr-FR" dirty="0"/>
-              <a:t>Convertisseur ADC (I²C) : mesure tension batterie </a:t>
-            </a:r>
-          </a:p>
-          <a:p>
-            <a:pPr marL="685800" indent="-342900">
-              <a:buChar char="-"/>
-            </a:pPr>
-            <a:r>
-              <a:rPr lang="fr-FR" dirty="0"/>
-              <a:t>Diodes Zener en protection de l’entrée AIN de U2</a:t>
-            </a:r>
-          </a:p>
-          <a:p>
-            <a:pPr marL="685800" indent="-342900">
-              <a:buChar char="-"/>
-            </a:pPr>
-            <a:r>
-              <a:rPr lang="fr-FR" dirty="0"/>
-              <a:t>LEDs indicatrices de présence de tension (VBAT, 5V, 3,3V)</a:t>
-            </a:r>
-          </a:p>
-        </p:txBody>
-      </p:sp>
-      <p:pic>
-        <p:nvPicPr>
-          <p:cNvPr id="7" name="Image 6">
-            <a:extLst>
-              <a:ext uri="{FF2B5EF4-FFF2-40B4-BE49-F238E27FC236}">
-                <a16:creationId xmlns:a16="http://schemas.microsoft.com/office/drawing/2014/main" id="{B74DF4E9-180A-366D-05C8-26F3F3A529E9}"/>
-              </a:ext>
-            </a:extLst>
-          </p:cNvPr>
-          <p:cNvPicPr/>
-          <p:nvPr/>
-        </p:nvPicPr>
-        <p:blipFill>
-          <a:blip r:embed="rId2">
-            <a:lum/>
-            <a:alphaModFix/>
-          </a:blip>
-          <a:srcRect/>
-          <a:stretch>
-            <a:fillRect/>
-          </a:stretch>
-        </p:blipFill>
-        <p:spPr>
-          <a:xfrm rot="5400013">
-            <a:off x="7231925" y="1024864"/>
-            <a:ext cx="2650273" cy="4571236"/>
-          </a:xfrm>
-          <a:prstGeom prst="rect">
-            <a:avLst/>
-          </a:prstGeom>
-          <a:noFill/>
-          <a:ln>
-            <a:noFill/>
-            <a:prstDash/>
-          </a:ln>
-        </p:spPr>
-      </p:pic>
-      <p:pic>
-        <p:nvPicPr>
-          <p:cNvPr id="8" name="Image 7">
-            <a:extLst>
-              <a:ext uri="{FF2B5EF4-FFF2-40B4-BE49-F238E27FC236}">
-                <a16:creationId xmlns:a16="http://schemas.microsoft.com/office/drawing/2014/main" id="{B4C2532D-9B5A-D4BA-EA29-4B7A1866819E}"/>
-              </a:ext>
-            </a:extLst>
-          </p:cNvPr>
-          <p:cNvPicPr/>
-          <p:nvPr/>
-        </p:nvPicPr>
-        <p:blipFill>
-          <a:blip r:embed="rId3">
-            <a:lum/>
-            <a:alphaModFix/>
-          </a:blip>
-          <a:srcRect/>
-          <a:stretch>
-            <a:fillRect/>
-          </a:stretch>
-        </p:blipFill>
-        <p:spPr>
-          <a:xfrm rot="5400013">
-            <a:off x="1865201" y="2962652"/>
-            <a:ext cx="2863847" cy="4571233"/>
-          </a:xfrm>
-          <a:prstGeom prst="rect">
-            <a:avLst/>
-          </a:prstGeom>
-          <a:noFill/>
-          <a:ln>
-            <a:noFill/>
-            <a:prstDash/>
-          </a:ln>
-        </p:spPr>
-      </p:pic>
-    </p:spTree>
-    <p:extLst>
-      <p:ext uri="{BB962C8B-B14F-4D97-AF65-F5344CB8AC3E}">
-        <p14:creationId xmlns:p14="http://schemas.microsoft.com/office/powerpoint/2010/main" val="2304892556"/>
-      </p:ext>
-    </p:extLst>
-  </p:cSld>
-  <p:clrMapOvr>
-    <a:masterClrMapping/>
-  </p:clrMapOvr>
-</p:sld>
-</file>
-
-<file path=ppt/slides/slide13.xml><?xml version="1.0" encoding="utf-8"?>
+<file path=ppt/slides/slide11.xml><?xml version="1.0" encoding="utf-8"?>
 <p:sld xmlns:a="http://schemas.openxmlformats.org/drawingml/2006/main" xmlns:r="http://schemas.openxmlformats.org/officeDocument/2006/relationships" xmlns:p="http://schemas.openxmlformats.org/presentationml/2006/main">
   <p:cSld>
     <p:spTree>
@@ -25655,7 +25199,7 @@
             <a:fld id="{C263D6C4-4840-40CC-AC84-17E24B3B7BDE}" type="slidenum">
               <a:rPr lang="fr-FR" noProof="0" smtClean="0"/>
               <a:pPr rtl="0"/>
-              <a:t>13</a:t>
+              <a:t>11</a:t>
             </a:fld>
             <a:endParaRPr lang="fr-FR" noProof="0"/>
           </a:p>
@@ -25803,6 +25347,43 @@
           </a:ln>
         </p:spPr>
       </p:pic>
+      <p:pic>
+        <p:nvPicPr>
+          <p:cNvPr id="4" name="Image3">
+            <a:extLst>
+              <a:ext uri="{FF2B5EF4-FFF2-40B4-BE49-F238E27FC236}">
+                <a16:creationId xmlns:a16="http://schemas.microsoft.com/office/drawing/2014/main" id="{AA855E2D-0E92-FEEB-6A72-1E49F038BC55}"/>
+              </a:ext>
+            </a:extLst>
+          </p:cNvPr>
+          <p:cNvPicPr/>
+          <p:nvPr/>
+        </p:nvPicPr>
+        <p:blipFill>
+          <a:blip r:embed="rId4">
+            <a:lum/>
+            <a:alphaModFix/>
+          </a:blip>
+          <a:srcRect l="13596" t="25048" r="13807" b="27279"/>
+          <a:stretch>
+            <a:fillRect/>
+          </a:stretch>
+        </p:blipFill>
+        <p:spPr>
+          <a:xfrm>
+            <a:off x="10088545" y="0"/>
+            <a:ext cx="2103455" cy="783771"/>
+          </a:xfrm>
+          <a:prstGeom prst="rect">
+            <a:avLst/>
+          </a:prstGeom>
+          <a:noFill/>
+          <a:ln>
+            <a:noFill/>
+            <a:prstDash/>
+          </a:ln>
+        </p:spPr>
+      </p:pic>
     </p:spTree>
     <p:extLst>
       <p:ext uri="{BB962C8B-B14F-4D97-AF65-F5344CB8AC3E}">
@@ -25816,7 +25397,7 @@
 </p:sld>
 </file>
 
-<file path=ppt/slides/slide14.xml><?xml version="1.0" encoding="utf-8"?>
+<file path=ppt/slides/slide12.xml><?xml version="1.0" encoding="utf-8"?>
 <p:sld xmlns:a="http://schemas.openxmlformats.org/drawingml/2006/main" xmlns:r="http://schemas.openxmlformats.org/officeDocument/2006/relationships" xmlns:p="http://schemas.openxmlformats.org/presentationml/2006/main">
   <p:cSld>
     <p:spTree>
@@ -25858,7 +25439,7 @@
             <a:fld id="{C263D6C4-4840-40CC-AC84-17E24B3B7BDE}" type="slidenum">
               <a:rPr lang="fr-FR" noProof="0" smtClean="0"/>
               <a:pPr rtl="0"/>
-              <a:t>14</a:t>
+              <a:t>12</a:t>
             </a:fld>
             <a:endParaRPr lang="fr-FR" noProof="0"/>
           </a:p>
@@ -25984,6 +25565,43 @@
           </a:ln>
         </p:spPr>
       </p:pic>
+      <p:pic>
+        <p:nvPicPr>
+          <p:cNvPr id="2" name="Image3">
+            <a:extLst>
+              <a:ext uri="{FF2B5EF4-FFF2-40B4-BE49-F238E27FC236}">
+                <a16:creationId xmlns:a16="http://schemas.microsoft.com/office/drawing/2014/main" id="{456ECEA6-A508-C2E8-9773-F5D67646C0EF}"/>
+              </a:ext>
+            </a:extLst>
+          </p:cNvPr>
+          <p:cNvPicPr/>
+          <p:nvPr/>
+        </p:nvPicPr>
+        <p:blipFill>
+          <a:blip r:embed="rId4">
+            <a:lum/>
+            <a:alphaModFix/>
+          </a:blip>
+          <a:srcRect l="13596" t="25048" r="13807" b="27279"/>
+          <a:stretch>
+            <a:fillRect/>
+          </a:stretch>
+        </p:blipFill>
+        <p:spPr>
+          <a:xfrm>
+            <a:off x="10088545" y="0"/>
+            <a:ext cx="2103455" cy="783771"/>
+          </a:xfrm>
+          <a:prstGeom prst="rect">
+            <a:avLst/>
+          </a:prstGeom>
+          <a:noFill/>
+          <a:ln>
+            <a:noFill/>
+            <a:prstDash/>
+          </a:ln>
+        </p:spPr>
+      </p:pic>
     </p:spTree>
     <p:extLst>
       <p:ext uri="{BB962C8B-B14F-4D97-AF65-F5344CB8AC3E}">
@@ -25997,7 +25615,7 @@
 </p:sld>
 </file>
 
-<file path=ppt/slides/slide15.xml><?xml version="1.0" encoding="utf-8"?>
+<file path=ppt/slides/slide13.xml><?xml version="1.0" encoding="utf-8"?>
 <p:sld xmlns:a="http://schemas.openxmlformats.org/drawingml/2006/main" xmlns:r="http://schemas.openxmlformats.org/officeDocument/2006/relationships" xmlns:p="http://schemas.openxmlformats.org/presentationml/2006/main">
   <p:cSld>
     <p:spTree>
@@ -26061,7 +25679,7 @@
             <a:fld id="{C263D6C4-4840-40CC-AC84-17E24B3B7BDE}" type="slidenum">
               <a:rPr lang="fr-FR" smtClean="0"/>
               <a:pPr rtl="0"/>
-              <a:t>15</a:t>
+              <a:t>13</a:t>
             </a:fld>
             <a:endParaRPr lang="fr-FR"/>
           </a:p>
@@ -26289,7 +25907,7 @@
 </p:sld>
 </file>
 
-<file path=ppt/slides/slide16.xml><?xml version="1.0" encoding="utf-8"?>
+<file path=ppt/slides/slide14.xml><?xml version="1.0" encoding="utf-8"?>
 <p:sld xmlns:a="http://schemas.openxmlformats.org/drawingml/2006/main" xmlns:r="http://schemas.openxmlformats.org/officeDocument/2006/relationships" xmlns:p="http://schemas.openxmlformats.org/presentationml/2006/main">
   <p:cSld>
     <p:spTree>
@@ -26359,7 +25977,7 @@
             <a:fld id="{C263D6C4-4840-40CC-AC84-17E24B3B7BDE}" type="slidenum">
               <a:rPr lang="fr-FR" noProof="0" smtClean="0"/>
               <a:pPr rtl="0"/>
-              <a:t>16</a:t>
+              <a:t>14</a:t>
             </a:fld>
             <a:endParaRPr lang="fr-FR" noProof="0"/>
           </a:p>
@@ -26611,6 +26229,43 @@
           </p:txBody>
         </p:sp>
       </p:grpSp>
+      <p:pic>
+        <p:nvPicPr>
+          <p:cNvPr id="2" name="Image3">
+            <a:extLst>
+              <a:ext uri="{FF2B5EF4-FFF2-40B4-BE49-F238E27FC236}">
+                <a16:creationId xmlns:a16="http://schemas.microsoft.com/office/drawing/2014/main" id="{E8639B04-F417-7164-1D0F-2EA401FD34C5}"/>
+              </a:ext>
+            </a:extLst>
+          </p:cNvPr>
+          <p:cNvPicPr/>
+          <p:nvPr/>
+        </p:nvPicPr>
+        <p:blipFill>
+          <a:blip r:embed="rId6">
+            <a:lum/>
+            <a:alphaModFix/>
+          </a:blip>
+          <a:srcRect l="13596" t="25048" r="13807" b="27279"/>
+          <a:stretch>
+            <a:fillRect/>
+          </a:stretch>
+        </p:blipFill>
+        <p:spPr>
+          <a:xfrm>
+            <a:off x="10088545" y="0"/>
+            <a:ext cx="2103455" cy="783771"/>
+          </a:xfrm>
+          <a:prstGeom prst="rect">
+            <a:avLst/>
+          </a:prstGeom>
+          <a:noFill/>
+          <a:ln>
+            <a:noFill/>
+            <a:prstDash/>
+          </a:ln>
+        </p:spPr>
+      </p:pic>
     </p:spTree>
     <p:extLst>
       <p:ext uri="{BB962C8B-B14F-4D97-AF65-F5344CB8AC3E}">
@@ -26624,7 +26279,7 @@
 </p:sld>
 </file>
 
-<file path=ppt/slides/slide17.xml><?xml version="1.0" encoding="utf-8"?>
+<file path=ppt/slides/slide15.xml><?xml version="1.0" encoding="utf-8"?>
 <p:sld xmlns:a="http://schemas.openxmlformats.org/drawingml/2006/main" xmlns:r="http://schemas.openxmlformats.org/officeDocument/2006/relationships" xmlns:p="http://schemas.openxmlformats.org/presentationml/2006/main">
   <p:cSld>
     <p:spTree>
@@ -26694,7 +26349,7 @@
             <a:fld id="{C263D6C4-4840-40CC-AC84-17E24B3B7BDE}" type="slidenum">
               <a:rPr lang="fr-FR" noProof="0" smtClean="0"/>
               <a:pPr rtl="0"/>
-              <a:t>17</a:t>
+              <a:t>15</a:t>
             </a:fld>
             <a:endParaRPr lang="fr-FR" noProof="0"/>
           </a:p>
@@ -26887,6 +26542,43 @@
           </a:extLst>
         </p:spPr>
       </p:pic>
+      <p:pic>
+        <p:nvPicPr>
+          <p:cNvPr id="7" name="Image3">
+            <a:extLst>
+              <a:ext uri="{FF2B5EF4-FFF2-40B4-BE49-F238E27FC236}">
+                <a16:creationId xmlns:a16="http://schemas.microsoft.com/office/drawing/2014/main" id="{4095EE34-B323-C5AF-CD09-0117F4BFCD92}"/>
+              </a:ext>
+            </a:extLst>
+          </p:cNvPr>
+          <p:cNvPicPr/>
+          <p:nvPr/>
+        </p:nvPicPr>
+        <p:blipFill>
+          <a:blip r:embed="rId5">
+            <a:lum/>
+            <a:alphaModFix/>
+          </a:blip>
+          <a:srcRect l="13596" t="25048" r="13807" b="27279"/>
+          <a:stretch>
+            <a:fillRect/>
+          </a:stretch>
+        </p:blipFill>
+        <p:spPr>
+          <a:xfrm>
+            <a:off x="10088545" y="0"/>
+            <a:ext cx="2103455" cy="783771"/>
+          </a:xfrm>
+          <a:prstGeom prst="rect">
+            <a:avLst/>
+          </a:prstGeom>
+          <a:noFill/>
+          <a:ln>
+            <a:noFill/>
+            <a:prstDash/>
+          </a:ln>
+        </p:spPr>
+      </p:pic>
     </p:spTree>
     <p:extLst>
       <p:ext uri="{BB962C8B-B14F-4D97-AF65-F5344CB8AC3E}">
@@ -26900,7 +26592,7 @@
 </p:sld>
 </file>
 
-<file path=ppt/slides/slide18.xml><?xml version="1.0" encoding="utf-8"?>
+<file path=ppt/slides/slide16.xml><?xml version="1.0" encoding="utf-8"?>
 <p:sld xmlns:a="http://schemas.openxmlformats.org/drawingml/2006/main" xmlns:r="http://schemas.openxmlformats.org/officeDocument/2006/relationships" xmlns:p="http://schemas.openxmlformats.org/presentationml/2006/main">
   <p:cSld>
     <p:spTree>
@@ -26964,7 +26656,7 @@
             <a:fld id="{C263D6C4-4840-40CC-AC84-17E24B3B7BDE}" type="slidenum">
               <a:rPr lang="fr-FR" smtClean="0"/>
               <a:pPr rtl="0"/>
-              <a:t>18</a:t>
+              <a:t>16</a:t>
             </a:fld>
             <a:endParaRPr lang="fr-FR"/>
           </a:p>
@@ -27207,7 +26899,7 @@
 </p:sld>
 </file>
 
-<file path=ppt/slides/slide19.xml><?xml version="1.0" encoding="utf-8"?>
+<file path=ppt/slides/slide17.xml><?xml version="1.0" encoding="utf-8"?>
 <p:sld xmlns:a="http://schemas.openxmlformats.org/drawingml/2006/main" xmlns:r="http://schemas.openxmlformats.org/officeDocument/2006/relationships" xmlns:p="http://schemas.openxmlformats.org/presentationml/2006/main">
   <p:cSld>
     <p:spTree>
@@ -27271,7 +26963,7 @@
             <a:fld id="{C263D6C4-4840-40CC-AC84-17E24B3B7BDE}" type="slidenum">
               <a:rPr lang="fr-FR" smtClean="0"/>
               <a:pPr rtl="0"/>
-              <a:t>19</a:t>
+              <a:t>17</a:t>
             </a:fld>
             <a:endParaRPr lang="fr-FR"/>
           </a:p>
@@ -27304,7 +26996,7 @@
                   <a:schemeClr val="bg1"/>
                 </a:solidFill>
               </a:rPr>
-              <a:t>Bilan des compétences </a:t>
+              <a:t>Bilan</a:t>
             </a:r>
           </a:p>
           <a:p>
@@ -27377,7 +27069,7 @@
                   <a:schemeClr val="bg1"/>
                 </a:solidFill>
               </a:rPr>
-              <a:t>Résultats concrets</a:t>
+              <a:t>Résultats</a:t>
             </a:r>
           </a:p>
           <a:p>
@@ -27390,7 +27082,7 @@
                   <a:schemeClr val="bg1"/>
                 </a:solidFill>
               </a:rPr>
-              <a:t>Système fonctionnel : page web accessible depuis un téléphone via Wi-Fi de l’ESP32, sans internet</a:t>
+              <a:t>Système fonctionnel avec une page web accessible depuis un téléphone via Wi-Fi de l’ESP32, </a:t>
             </a:r>
           </a:p>
           <a:p>
@@ -27403,7 +27095,7 @@
                   <a:schemeClr val="bg1"/>
                 </a:solidFill>
               </a:rPr>
-              <a:t>Approche globale d’un système électronique autonome : énergie, hardware et software simultanément</a:t>
+              <a:t>Approche d’un système électronique autonome : énergie, hardware et software simultanément</a:t>
             </a:r>
           </a:p>
         </p:txBody>
@@ -27450,6 +27142,73 @@
   <p:clrMapOvr>
     <a:masterClrMapping/>
   </p:clrMapOvr>
+</p:sld>
+</file>
+
+<file path=ppt/slides/slide18.xml><?xml version="1.0" encoding="utf-8"?>
+<p:sld xmlns:a="http://schemas.openxmlformats.org/drawingml/2006/main" xmlns:r="http://schemas.openxmlformats.org/officeDocument/2006/relationships" xmlns:p="http://schemas.openxmlformats.org/presentationml/2006/main">
+  <p:cSld>
+    <p:spTree>
+      <p:nvGrpSpPr>
+        <p:cNvPr id="1" name=""/>
+        <p:cNvGrpSpPr/>
+        <p:nvPr/>
+      </p:nvGrpSpPr>
+      <p:grpSpPr>
+        <a:xfrm>
+          <a:off x="0" y="0"/>
+          <a:ext cx="0" cy="0"/>
+          <a:chOff x="0" y="0"/>
+          <a:chExt cx="0" cy="0"/>
+        </a:xfrm>
+      </p:grpSpPr>
+      <p:sp>
+        <p:nvSpPr>
+          <p:cNvPr id="2" name="Titre 1">
+            <a:extLst>
+              <a:ext uri="{FF2B5EF4-FFF2-40B4-BE49-F238E27FC236}">
+                <a16:creationId xmlns:a16="http://schemas.microsoft.com/office/drawing/2014/main" id="{632BE5BF-9922-45FB-8F3F-4446D40A051B}"/>
+              </a:ext>
+            </a:extLst>
+          </p:cNvPr>
+          <p:cNvSpPr>
+            <a:spLocks noGrp="1"/>
+          </p:cNvSpPr>
+          <p:nvPr>
+            <p:ph type="ctrTitle"/>
+          </p:nvPr>
+        </p:nvSpPr>
+        <p:spPr>
+          <a:xfrm>
+            <a:off x="3623201" y="2807208"/>
+            <a:ext cx="4945598" cy="1243584"/>
+          </a:xfrm>
+        </p:spPr>
+        <p:txBody>
+          <a:bodyPr rtlCol="0"/>
+          <a:lstStyle/>
+          <a:p>
+            <a:pPr algn="ctr" rtl="0"/>
+            <a:r>
+              <a:rPr lang="fr-FR" sz="8000" dirty="0"/>
+              <a:t>Merci</a:t>
+            </a:r>
+          </a:p>
+        </p:txBody>
+      </p:sp>
+    </p:spTree>
+    <p:extLst>
+      <p:ext uri="{BB962C8B-B14F-4D97-AF65-F5344CB8AC3E}">
+        <p14:creationId xmlns:p14="http://schemas.microsoft.com/office/powerpoint/2010/main" val="429771863"/>
+      </p:ext>
+    </p:extLst>
+  </p:cSld>
+  <p:clrMapOvr>
+    <a:masterClrMapping/>
+  </p:clrMapOvr>
+  <p:transition spd="slow">
+    <p:wipe/>
+  </p:transition>
 </p:sld>
 </file>
 
@@ -27699,73 +27458,6 @@
       </p:transition>
     </mc:Fallback>
   </mc:AlternateContent>
-</p:sld>
-</file>
-
-<file path=ppt/slides/slide20.xml><?xml version="1.0" encoding="utf-8"?>
-<p:sld xmlns:a="http://schemas.openxmlformats.org/drawingml/2006/main" xmlns:r="http://schemas.openxmlformats.org/officeDocument/2006/relationships" xmlns:p="http://schemas.openxmlformats.org/presentationml/2006/main">
-  <p:cSld>
-    <p:spTree>
-      <p:nvGrpSpPr>
-        <p:cNvPr id="1" name=""/>
-        <p:cNvGrpSpPr/>
-        <p:nvPr/>
-      </p:nvGrpSpPr>
-      <p:grpSpPr>
-        <a:xfrm>
-          <a:off x="0" y="0"/>
-          <a:ext cx="0" cy="0"/>
-          <a:chOff x="0" y="0"/>
-          <a:chExt cx="0" cy="0"/>
-        </a:xfrm>
-      </p:grpSpPr>
-      <p:sp>
-        <p:nvSpPr>
-          <p:cNvPr id="2" name="Titre 1">
-            <a:extLst>
-              <a:ext uri="{FF2B5EF4-FFF2-40B4-BE49-F238E27FC236}">
-                <a16:creationId xmlns:a16="http://schemas.microsoft.com/office/drawing/2014/main" id="{632BE5BF-9922-45FB-8F3F-4446D40A051B}"/>
-              </a:ext>
-            </a:extLst>
-          </p:cNvPr>
-          <p:cNvSpPr>
-            <a:spLocks noGrp="1"/>
-          </p:cNvSpPr>
-          <p:nvPr>
-            <p:ph type="ctrTitle"/>
-          </p:nvPr>
-        </p:nvSpPr>
-        <p:spPr>
-          <a:xfrm>
-            <a:off x="3623201" y="2807208"/>
-            <a:ext cx="4945598" cy="1243584"/>
-          </a:xfrm>
-        </p:spPr>
-        <p:txBody>
-          <a:bodyPr rtlCol="0"/>
-          <a:lstStyle/>
-          <a:p>
-            <a:pPr algn="ctr" rtl="0"/>
-            <a:r>
-              <a:rPr lang="fr-FR" sz="8000" dirty="0"/>
-              <a:t>Merci</a:t>
-            </a:r>
-          </a:p>
-        </p:txBody>
-      </p:sp>
-    </p:spTree>
-    <p:extLst>
-      <p:ext uri="{BB962C8B-B14F-4D97-AF65-F5344CB8AC3E}">
-        <p14:creationId xmlns:p14="http://schemas.microsoft.com/office/powerpoint/2010/main" val="429771863"/>
-      </p:ext>
-    </p:extLst>
-  </p:cSld>
-  <p:clrMapOvr>
-    <a:masterClrMapping/>
-  </p:clrMapOvr>
-  <p:transition spd="slow">
-    <p:wipe/>
-  </p:transition>
 </p:sld>
 </file>
 
@@ -28086,15 +27778,15 @@
         </p:nvPicPr>
         <p:blipFill>
           <a:blip r:embed="rId2"/>
-          <a:srcRect l="17739" r="15711"/>
+          <a:srcRect l="17739" t="11635" r="62911" b="21224"/>
           <a:stretch>
             <a:fillRect/>
           </a:stretch>
         </p:blipFill>
         <p:spPr>
           <a:xfrm>
-            <a:off x="-1" y="2343163"/>
-            <a:ext cx="6591631" cy="4514837"/>
+            <a:off x="137786" y="1856478"/>
+            <a:ext cx="2755014" cy="4357604"/>
           </a:xfrm>
           <a:prstGeom prst="rect">
             <a:avLst/>
@@ -28117,14 +27809,15 @@
         </p:nvPicPr>
         <p:blipFill>
           <a:blip r:embed="rId3"/>
+          <a:srcRect l="18666" t="15090" r="-7403" b="-1193"/>
           <a:stretch>
             <a:fillRect/>
           </a:stretch>
         </p:blipFill>
         <p:spPr>
           <a:xfrm>
-            <a:off x="3904361" y="46292"/>
-            <a:ext cx="8347613" cy="4051252"/>
+            <a:off x="2993008" y="1652133"/>
+            <a:ext cx="9901830" cy="4662942"/>
           </a:xfrm>
           <a:prstGeom prst="rect">
             <a:avLst/>
@@ -28145,8 +27838,8 @@
         </p:nvSpPr>
         <p:spPr>
           <a:xfrm>
-            <a:off x="386194" y="1450390"/>
-            <a:ext cx="3910520" cy="646331"/>
+            <a:off x="444500" y="1282801"/>
+            <a:ext cx="8369499" cy="369332"/>
           </a:xfrm>
           <a:prstGeom prst="rect">
             <a:avLst/>
@@ -28170,6 +27863,43 @@
           </a:p>
         </p:txBody>
       </p:sp>
+      <p:pic>
+        <p:nvPicPr>
+          <p:cNvPr id="4" name="Image3">
+            <a:extLst>
+              <a:ext uri="{FF2B5EF4-FFF2-40B4-BE49-F238E27FC236}">
+                <a16:creationId xmlns:a16="http://schemas.microsoft.com/office/drawing/2014/main" id="{37E5D188-C6FB-4F93-2431-89CD3918A91E}"/>
+              </a:ext>
+            </a:extLst>
+          </p:cNvPr>
+          <p:cNvPicPr/>
+          <p:nvPr/>
+        </p:nvPicPr>
+        <p:blipFill>
+          <a:blip r:embed="rId4">
+            <a:lum/>
+            <a:alphaModFix/>
+          </a:blip>
+          <a:srcRect l="13596" t="25048" r="13807" b="27279"/>
+          <a:stretch>
+            <a:fillRect/>
+          </a:stretch>
+        </p:blipFill>
+        <p:spPr>
+          <a:xfrm>
+            <a:off x="10088545" y="0"/>
+            <a:ext cx="2103455" cy="783771"/>
+          </a:xfrm>
+          <a:prstGeom prst="rect">
+            <a:avLst/>
+          </a:prstGeom>
+          <a:noFill/>
+          <a:ln>
+            <a:noFill/>
+            <a:prstDash/>
+          </a:ln>
+        </p:spPr>
+      </p:pic>
     </p:spTree>
     <p:extLst>
       <p:ext uri="{BB962C8B-B14F-4D97-AF65-F5344CB8AC3E}">
@@ -28497,8 +28227,8 @@
         </p:blipFill>
         <p:spPr>
           <a:xfrm>
-            <a:off x="1909321" y="1381282"/>
-            <a:ext cx="8568204" cy="5298918"/>
+            <a:off x="3018773" y="1016156"/>
+            <a:ext cx="8956509" cy="5539061"/>
           </a:xfrm>
           <a:prstGeom prst="rect">
             <a:avLst/>
@@ -28519,8 +28249,8 @@
         </p:nvSpPr>
         <p:spPr>
           <a:xfrm>
-            <a:off x="111318" y="1494845"/>
-            <a:ext cx="1900362" cy="646331"/>
+            <a:off x="111317" y="1494845"/>
+            <a:ext cx="3295761" cy="369332"/>
           </a:xfrm>
           <a:prstGeom prst="rect">
             <a:avLst/>
@@ -28539,12 +28269,49 @@
                   <a:schemeClr val="bg1"/>
                 </a:solidFill>
               </a:rPr>
-              <a:t>diagramme des exigences</a:t>
+              <a:t>Diagramme des exigences</a:t>
             </a:r>
             <a:endParaRPr lang="fr-FR" dirty="0"/>
           </a:p>
         </p:txBody>
       </p:sp>
+      <p:pic>
+        <p:nvPicPr>
+          <p:cNvPr id="6" name="Image3">
+            <a:extLst>
+              <a:ext uri="{FF2B5EF4-FFF2-40B4-BE49-F238E27FC236}">
+                <a16:creationId xmlns:a16="http://schemas.microsoft.com/office/drawing/2014/main" id="{4AB42D3F-4D5C-0A67-E8D5-2057BE33FB2B}"/>
+              </a:ext>
+            </a:extLst>
+          </p:cNvPr>
+          <p:cNvPicPr/>
+          <p:nvPr/>
+        </p:nvPicPr>
+        <p:blipFill>
+          <a:blip r:embed="rId3">
+            <a:lum/>
+            <a:alphaModFix/>
+          </a:blip>
+          <a:srcRect l="13596" t="25048" r="13807" b="27279"/>
+          <a:stretch>
+            <a:fillRect/>
+          </a:stretch>
+        </p:blipFill>
+        <p:spPr>
+          <a:xfrm>
+            <a:off x="10088545" y="0"/>
+            <a:ext cx="2103455" cy="783771"/>
+          </a:xfrm>
+          <a:prstGeom prst="rect">
+            <a:avLst/>
+          </a:prstGeom>
+          <a:noFill/>
+          <a:ln>
+            <a:noFill/>
+            <a:prstDash/>
+          </a:ln>
+        </p:spPr>
+      </p:pic>
     </p:spTree>
     <p:extLst>
       <p:ext uri="{BB962C8B-B14F-4D97-AF65-F5344CB8AC3E}">
@@ -28851,164 +28618,6 @@
       </p:grpSpPr>
       <p:sp>
         <p:nvSpPr>
-          <p:cNvPr id="2" name="Titre 1">
-            <a:extLst>
-              <a:ext uri="{FF2B5EF4-FFF2-40B4-BE49-F238E27FC236}">
-                <a16:creationId xmlns:a16="http://schemas.microsoft.com/office/drawing/2014/main" id="{B4D5E9E3-63C9-08C1-E1BE-1F93FB44DB34}"/>
-              </a:ext>
-            </a:extLst>
-          </p:cNvPr>
-          <p:cNvSpPr>
-            <a:spLocks noGrp="1"/>
-          </p:cNvSpPr>
-          <p:nvPr>
-            <p:ph type="title"/>
-          </p:nvPr>
-        </p:nvSpPr>
-        <p:spPr/>
-        <p:txBody>
-          <a:bodyPr/>
-          <a:lstStyle/>
-          <a:p>
-            <a:r>
-              <a:rPr lang="fr-FR" dirty="0"/>
-              <a:t>4) Mesure et calcul de la consommation</a:t>
-            </a:r>
-          </a:p>
-        </p:txBody>
-      </p:sp>
-      <p:sp>
-        <p:nvSpPr>
-          <p:cNvPr id="3" name="Espace réservé du numéro de diapositive 2">
-            <a:extLst>
-              <a:ext uri="{FF2B5EF4-FFF2-40B4-BE49-F238E27FC236}">
-                <a16:creationId xmlns:a16="http://schemas.microsoft.com/office/drawing/2014/main" id="{3A12CED5-7287-C423-B6EC-70406B887B6B}"/>
-              </a:ext>
-            </a:extLst>
-          </p:cNvPr>
-          <p:cNvSpPr>
-            <a:spLocks noGrp="1"/>
-          </p:cNvSpPr>
-          <p:nvPr>
-            <p:ph type="sldNum" sz="quarter" idx="12"/>
-          </p:nvPr>
-        </p:nvSpPr>
-        <p:spPr/>
-        <p:txBody>
-          <a:bodyPr/>
-          <a:lstStyle/>
-          <a:p>
-            <a:pPr rtl="0"/>
-            <a:fld id="{C263D6C4-4840-40CC-AC84-17E24B3B7BDE}" type="slidenum">
-              <a:rPr lang="fr-FR" noProof="0" smtClean="0"/>
-              <a:pPr rtl="0"/>
-              <a:t>8</a:t>
-            </a:fld>
-            <a:endParaRPr lang="fr-FR" noProof="0"/>
-          </a:p>
-        </p:txBody>
-      </p:sp>
-      <p:sp>
-        <p:nvSpPr>
-          <p:cNvPr id="4" name="Espace réservé du texte 3">
-            <a:extLst>
-              <a:ext uri="{FF2B5EF4-FFF2-40B4-BE49-F238E27FC236}">
-                <a16:creationId xmlns:a16="http://schemas.microsoft.com/office/drawing/2014/main" id="{802C0CEE-C6B3-4D52-34A9-72882F5CD133}"/>
-              </a:ext>
-            </a:extLst>
-          </p:cNvPr>
-          <p:cNvSpPr>
-            <a:spLocks noGrp="1"/>
-          </p:cNvSpPr>
-          <p:nvPr>
-            <p:ph type="body" sz="quarter" idx="13"/>
-          </p:nvPr>
-        </p:nvSpPr>
-        <p:spPr/>
-        <p:txBody>
-          <a:bodyPr/>
-          <a:lstStyle/>
-          <a:p>
-            <a:r>
-              <a:rPr lang="fr-FR" dirty="0"/>
-              <a:t>Tableau relevé par le panneau solaire avec une </a:t>
-            </a:r>
-            <a:r>
-              <a:rPr lang="fr-FR" dirty="0" err="1"/>
-              <a:t>resistance</a:t>
-            </a:r>
-            <a:r>
-              <a:rPr lang="fr-FR" dirty="0"/>
-              <a:t> variable</a:t>
-            </a:r>
-          </a:p>
-          <a:p>
-            <a:endParaRPr lang="fr-FR" dirty="0"/>
-          </a:p>
-        </p:txBody>
-      </p:sp>
-      <p:pic>
-        <p:nvPicPr>
-          <p:cNvPr id="6" name="Image 5">
-            <a:extLst>
-              <a:ext uri="{FF2B5EF4-FFF2-40B4-BE49-F238E27FC236}">
-                <a16:creationId xmlns:a16="http://schemas.microsoft.com/office/drawing/2014/main" id="{228DF5CF-7F3B-D353-4B62-1F99EC3625CB}"/>
-              </a:ext>
-            </a:extLst>
-          </p:cNvPr>
-          <p:cNvPicPr>
-            <a:picLocks noChangeAspect="1"/>
-          </p:cNvPicPr>
-          <p:nvPr/>
-        </p:nvPicPr>
-        <p:blipFill>
-          <a:blip r:embed="rId2"/>
-          <a:stretch>
-            <a:fillRect/>
-          </a:stretch>
-        </p:blipFill>
-        <p:spPr>
-          <a:xfrm>
-            <a:off x="619429" y="2823782"/>
-            <a:ext cx="4329997" cy="1745967"/>
-          </a:xfrm>
-          <a:prstGeom prst="rect">
-            <a:avLst/>
-          </a:prstGeom>
-        </p:spPr>
-      </p:pic>
-    </p:spTree>
-    <p:extLst>
-      <p:ext uri="{BB962C8B-B14F-4D97-AF65-F5344CB8AC3E}">
-        <p14:creationId xmlns:p14="http://schemas.microsoft.com/office/powerpoint/2010/main" val="2197264914"/>
-      </p:ext>
-    </p:extLst>
-  </p:cSld>
-  <p:clrMapOvr>
-    <a:masterClrMapping/>
-  </p:clrMapOvr>
-</p:sld>
-</file>
-
-<file path=ppt/slides/slide9.xml><?xml version="1.0" encoding="utf-8"?>
-<p:sld xmlns:a="http://schemas.openxmlformats.org/drawingml/2006/main" xmlns:r="http://schemas.openxmlformats.org/officeDocument/2006/relationships" xmlns:p="http://schemas.openxmlformats.org/presentationml/2006/main">
-  <p:cSld>
-    <p:spTree>
-      <p:nvGrpSpPr>
-        <p:cNvPr id="1" name=""/>
-        <p:cNvGrpSpPr/>
-        <p:nvPr/>
-      </p:nvGrpSpPr>
-      <p:grpSpPr>
-        <a:xfrm>
-          <a:off x="0" y="0"/>
-          <a:ext cx="0" cy="0"/>
-          <a:chOff x="0" y="0"/>
-          <a:chExt cx="0" cy="0"/>
-        </a:xfrm>
-      </p:grpSpPr>
-      <p:sp>
-        <p:nvSpPr>
           <p:cNvPr id="4" name="Titre 3"/>
           <p:cNvSpPr>
             <a:spLocks noGrp="1"/>
@@ -29054,7 +28663,7 @@
             <a:fld id="{C263D6C4-4840-40CC-AC84-17E24B3B7BDE}" type="slidenum">
               <a:rPr lang="fr-FR" smtClean="0"/>
               <a:pPr rtl="0"/>
-              <a:t>9</a:t>
+              <a:t>8</a:t>
             </a:fld>
             <a:endParaRPr lang="fr-FR"/>
           </a:p>
@@ -29272,6 +28881,233 @@
         </p:spPr>
       </p:pic>
     </p:spTree>
+  </p:cSld>
+  <p:clrMapOvr>
+    <a:masterClrMapping/>
+  </p:clrMapOvr>
+</p:sld>
+</file>
+
+<file path=ppt/slides/slide9.xml><?xml version="1.0" encoding="utf-8"?>
+<p:sld xmlns:a="http://schemas.openxmlformats.org/drawingml/2006/main" xmlns:r="http://schemas.openxmlformats.org/officeDocument/2006/relationships" xmlns:p="http://schemas.openxmlformats.org/presentationml/2006/main">
+  <p:cSld>
+    <p:spTree>
+      <p:nvGrpSpPr>
+        <p:cNvPr id="1" name=""/>
+        <p:cNvGrpSpPr/>
+        <p:nvPr/>
+      </p:nvGrpSpPr>
+      <p:grpSpPr>
+        <a:xfrm>
+          <a:off x="0" y="0"/>
+          <a:ext cx="0" cy="0"/>
+          <a:chOff x="0" y="0"/>
+          <a:chExt cx="0" cy="0"/>
+        </a:xfrm>
+      </p:grpSpPr>
+      <p:sp>
+        <p:nvSpPr>
+          <p:cNvPr id="4" name="Titre 3">
+            <a:extLst>
+              <a:ext uri="{FF2B5EF4-FFF2-40B4-BE49-F238E27FC236}">
+                <a16:creationId xmlns:a16="http://schemas.microsoft.com/office/drawing/2014/main" id="{002B1A51-0F48-A4D8-99E7-F737CCDEF142}"/>
+              </a:ext>
+            </a:extLst>
+          </p:cNvPr>
+          <p:cNvSpPr>
+            <a:spLocks noGrp="1"/>
+          </p:cNvSpPr>
+          <p:nvPr>
+            <p:ph type="title"/>
+          </p:nvPr>
+        </p:nvSpPr>
+        <p:spPr/>
+        <p:txBody>
+          <a:bodyPr/>
+          <a:lstStyle/>
+          <a:p>
+            <a:r>
+              <a:rPr lang="fr-FR" dirty="0"/>
+              <a:t>5) Site et codes</a:t>
+            </a:r>
+          </a:p>
+        </p:txBody>
+      </p:sp>
+      <p:sp>
+        <p:nvSpPr>
+          <p:cNvPr id="3" name="Espace réservé du numéro de diapositive 2">
+            <a:extLst>
+              <a:ext uri="{FF2B5EF4-FFF2-40B4-BE49-F238E27FC236}">
+                <a16:creationId xmlns:a16="http://schemas.microsoft.com/office/drawing/2014/main" id="{B76FC3BC-F03A-C119-2E1D-533EDAF1D4CC}"/>
+              </a:ext>
+            </a:extLst>
+          </p:cNvPr>
+          <p:cNvSpPr>
+            <a:spLocks noGrp="1"/>
+          </p:cNvSpPr>
+          <p:nvPr>
+            <p:ph type="sldNum" sz="quarter" idx="12"/>
+          </p:nvPr>
+        </p:nvSpPr>
+        <p:spPr/>
+        <p:txBody>
+          <a:bodyPr/>
+          <a:lstStyle/>
+          <a:p>
+            <a:pPr rtl="0"/>
+            <a:fld id="{C263D6C4-4840-40CC-AC84-17E24B3B7BDE}" type="slidenum">
+              <a:rPr lang="fr-FR" noProof="0" smtClean="0"/>
+              <a:pPr rtl="0"/>
+              <a:t>9</a:t>
+            </a:fld>
+            <a:endParaRPr lang="fr-FR" noProof="0"/>
+          </a:p>
+        </p:txBody>
+      </p:sp>
+      <p:sp>
+        <p:nvSpPr>
+          <p:cNvPr id="5" name="Espace réservé du texte 4">
+            <a:extLst>
+              <a:ext uri="{FF2B5EF4-FFF2-40B4-BE49-F238E27FC236}">
+                <a16:creationId xmlns:a16="http://schemas.microsoft.com/office/drawing/2014/main" id="{1A4C90AA-8285-62FA-9A71-3FDFEC59724C}"/>
+              </a:ext>
+            </a:extLst>
+          </p:cNvPr>
+          <p:cNvSpPr>
+            <a:spLocks noGrp="1"/>
+          </p:cNvSpPr>
+          <p:nvPr>
+            <p:ph type="body" sz="quarter" idx="13"/>
+          </p:nvPr>
+        </p:nvSpPr>
+        <p:spPr>
+          <a:xfrm>
+            <a:off x="193412" y="1206537"/>
+            <a:ext cx="6718300" cy="4093243"/>
+          </a:xfrm>
+        </p:spPr>
+        <p:txBody>
+          <a:bodyPr/>
+          <a:lstStyle/>
+          <a:p>
+            <a:pPr marL="342900" indent="-342900"/>
+            <a:r>
+              <a:rPr lang="fr-FR" dirty="0"/>
+              <a:t>Algorigramme du site </a:t>
+            </a:r>
+          </a:p>
+        </p:txBody>
+      </p:sp>
+      <p:pic>
+        <p:nvPicPr>
+          <p:cNvPr id="6" name="Image10">
+            <a:extLst>
+              <a:ext uri="{FF2B5EF4-FFF2-40B4-BE49-F238E27FC236}">
+                <a16:creationId xmlns:a16="http://schemas.microsoft.com/office/drawing/2014/main" id="{9DFEBD3E-0D2F-3919-EC23-91AB697611F5}"/>
+              </a:ext>
+            </a:extLst>
+          </p:cNvPr>
+          <p:cNvPicPr/>
+          <p:nvPr/>
+        </p:nvPicPr>
+        <p:blipFill>
+          <a:blip r:embed="rId2">
+            <a:lum/>
+            <a:alphaModFix/>
+          </a:blip>
+          <a:srcRect/>
+          <a:stretch>
+            <a:fillRect/>
+          </a:stretch>
+        </p:blipFill>
+        <p:spPr>
+          <a:xfrm>
+            <a:off x="6051550" y="1558220"/>
+            <a:ext cx="5696710" cy="4277090"/>
+          </a:xfrm>
+          <a:prstGeom prst="rect">
+            <a:avLst/>
+          </a:prstGeom>
+          <a:noFill/>
+          <a:ln>
+            <a:noFill/>
+            <a:prstDash/>
+          </a:ln>
+        </p:spPr>
+      </p:pic>
+      <p:pic>
+        <p:nvPicPr>
+          <p:cNvPr id="7" name="Image3">
+            <a:extLst>
+              <a:ext uri="{FF2B5EF4-FFF2-40B4-BE49-F238E27FC236}">
+                <a16:creationId xmlns:a16="http://schemas.microsoft.com/office/drawing/2014/main" id="{8025A8A9-ACD7-0E78-4FF2-7826C7DE7843}"/>
+              </a:ext>
+            </a:extLst>
+          </p:cNvPr>
+          <p:cNvPicPr/>
+          <p:nvPr/>
+        </p:nvPicPr>
+        <p:blipFill>
+          <a:blip r:embed="rId3">
+            <a:lum/>
+            <a:alphaModFix/>
+          </a:blip>
+          <a:srcRect l="13596" t="25048" r="13807" b="27279"/>
+          <a:stretch>
+            <a:fillRect/>
+          </a:stretch>
+        </p:blipFill>
+        <p:spPr>
+          <a:xfrm>
+            <a:off x="10088545" y="0"/>
+            <a:ext cx="2103455" cy="783771"/>
+          </a:xfrm>
+          <a:prstGeom prst="rect">
+            <a:avLst/>
+          </a:prstGeom>
+          <a:noFill/>
+          <a:ln>
+            <a:noFill/>
+            <a:prstDash/>
+          </a:ln>
+        </p:spPr>
+      </p:pic>
+      <p:pic>
+        <p:nvPicPr>
+          <p:cNvPr id="9" name="Image 8">
+            <a:extLst>
+              <a:ext uri="{FF2B5EF4-FFF2-40B4-BE49-F238E27FC236}">
+                <a16:creationId xmlns:a16="http://schemas.microsoft.com/office/drawing/2014/main" id="{F39B0169-1183-7CCE-E9ED-6BF2F10A0C42}"/>
+              </a:ext>
+            </a:extLst>
+          </p:cNvPr>
+          <p:cNvPicPr>
+            <a:picLocks noChangeAspect="1"/>
+          </p:cNvPicPr>
+          <p:nvPr/>
+        </p:nvPicPr>
+        <p:blipFill>
+          <a:blip r:embed="rId4"/>
+          <a:stretch>
+            <a:fillRect/>
+          </a:stretch>
+        </p:blipFill>
+        <p:spPr>
+          <a:xfrm>
+            <a:off x="443739" y="1558220"/>
+            <a:ext cx="4716657" cy="5418204"/>
+          </a:xfrm>
+          <a:prstGeom prst="rect">
+            <a:avLst/>
+          </a:prstGeom>
+        </p:spPr>
+      </p:pic>
+    </p:spTree>
+    <p:extLst>
+      <p:ext uri="{BB962C8B-B14F-4D97-AF65-F5344CB8AC3E}">
+        <p14:creationId xmlns:p14="http://schemas.microsoft.com/office/powerpoint/2010/main" val="3620413839"/>
+      </p:ext>
+    </p:extLst>
   </p:cSld>
   <p:clrMapOvr>
     <a:masterClrMapping/>
@@ -30080,15 +29916,6 @@
 </file>
 
 <file path=customXml/item2.xml><?xml version="1.0" encoding="utf-8"?>
-<?mso-contentType ?>
-<FormTemplates xmlns="http://schemas.microsoft.com/sharepoint/v3/contenttype/forms">
-  <Display>DocumentLibraryForm</Display>
-  <Edit>DocumentLibraryForm</Edit>
-  <New>DocumentLibraryForm</New>
-</FormTemplates>
-</file>
-
-<file path=customXml/item3.xml><?xml version="1.0" encoding="utf-8"?>
 <ct:contentTypeSchema xmlns:ct="http://schemas.microsoft.com/office/2006/metadata/contentType" xmlns:ma="http://schemas.microsoft.com/office/2006/metadata/properties/metaAttributes" ct:_="" ma:_="" ma:contentTypeName="Document" ma:contentTypeID="0x010100DEEA25CC0A0AC24199CDC46C25B8B0BC" ma:contentTypeVersion="10" ma:contentTypeDescription="Create a new document." ma:contentTypeScope="" ma:versionID="e3b47856d4cf355c0dacb39e1084d14f">
   <xsd:schema xmlns:xsd="http://www.w3.org/2001/XMLSchema" xmlns:xs="http://www.w3.org/2001/XMLSchema" xmlns:p="http://schemas.microsoft.com/office/2006/metadata/properties" xmlns:ns1="http://schemas.microsoft.com/sharepoint/v3" xmlns:ns2="6dc4bcd6-49db-4c07-9060-8acfc67cef9f" xmlns:ns3="fb0879af-3eba-417a-a55a-ffe6dcd6ca77" targetNamespace="http://schemas.microsoft.com/office/2006/metadata/properties" ma:root="true" ma:fieldsID="a845a615265fdb1f7b12cc65ac20ecbd" ns1:_="" ns2:_="" ns3:_="">
     <xsd:import namespace="http://schemas.microsoft.com/sharepoint/v3"/>
@@ -30296,6 +30123,15 @@
 </ct:contentTypeSchema>
 </file>
 
+<file path=customXml/item3.xml><?xml version="1.0" encoding="utf-8"?>
+<?mso-contentType ?>
+<FormTemplates xmlns="http://schemas.microsoft.com/sharepoint/v3/contenttype/forms">
+  <Display>DocumentLibraryForm</Display>
+  <Edit>DocumentLibraryForm</Edit>
+  <New>DocumentLibraryForm</New>
+</FormTemplates>
+</file>
+
 <file path=customXml/itemProps1.xml><?xml version="1.0" encoding="utf-8"?>
 <ds:datastoreItem xmlns:ds="http://schemas.openxmlformats.org/officeDocument/2006/customXml" ds:itemID="{F8992231-163D-4428-A2B8-DA1FE0274129}">
   <ds:schemaRefs>
@@ -30315,14 +30151,6 @@
 </file>
 
 <file path=customXml/itemProps2.xml><?xml version="1.0" encoding="utf-8"?>
-<ds:datastoreItem xmlns:ds="http://schemas.openxmlformats.org/officeDocument/2006/customXml" ds:itemID="{8A95DE24-D6C3-4A00-9085-D9594C193AE1}">
-  <ds:schemaRefs>
-    <ds:schemaRef ds:uri="http://schemas.microsoft.com/sharepoint/v3/contenttype/forms"/>
-  </ds:schemaRefs>
-</ds:datastoreItem>
-</file>
-
-<file path=customXml/itemProps3.xml><?xml version="1.0" encoding="utf-8"?>
 <ds:datastoreItem xmlns:ds="http://schemas.openxmlformats.org/officeDocument/2006/customXml" ds:itemID="{6B67ACAB-C3DC-429D-A23C-0723C084FEE5}">
   <ds:schemaRefs>
     <ds:schemaRef ds:uri="http://schemas.microsoft.com/office/2006/metadata/contentType"/>
@@ -30340,4 +30168,12 @@
     <ds:schemaRef ds:uri="http://schemas.microsoft.com/internal/obd"/>
   </ds:schemaRefs>
 </ds:datastoreItem>
+</file>
+
+<file path=customXml/itemProps3.xml><?xml version="1.0" encoding="utf-8"?>
+<ds:datastoreItem xmlns:ds="http://schemas.openxmlformats.org/officeDocument/2006/customXml" ds:itemID="{8A95DE24-D6C3-4A00-9085-D9594C193AE1}">
+  <ds:schemaRefs>
+    <ds:schemaRef ds:uri="http://schemas.microsoft.com/sharepoint/v3/contenttype/forms"/>
+  </ds:schemaRefs>
+</ds:datastoreItem>
 </file>